--- a/2.03ButtonsAndFunctions/Buttons.pptx
+++ b/2.03ButtonsAndFunctions/Buttons.pptx
@@ -217,7 +217,7 @@
           <a:p>
             <a:fld id="{19104133-B5B0-4351-8158-4F0E5EB1E2BF}" type="datetimeFigureOut">
               <a:rPr lang="en-US" smtClean="0"/>
-              <a:t>8/6/2025</a:t>
+              <a:t>6/8/2026</a:t>
             </a:fld>
             <a:endParaRPr lang="en-US"/>
           </a:p>
@@ -1870,7 +1870,7 @@
             <a:fld id="{1C2D31DE-C454-491C-B5C3-F097855E3DF7}" type="datetime4">
               <a:rPr lang="en-US" smtClean="0"/>
               <a:pPr/>
-              <a:t>August 6, 2025</a:t>
+              <a:t>June 8, 2026</a:t>
             </a:fld>
             <a:endParaRPr lang="en-US" dirty="0"/>
           </a:p>
@@ -5262,7 +5262,7 @@
           <a:p>
             <a:fld id="{5958763E-B898-436D-883D-03711491D54A}" type="datetimeFigureOut">
               <a:rPr lang="en-US" smtClean="0"/>
-              <a:t>8/6/2025</a:t>
+              <a:t>6/8/2026</a:t>
             </a:fld>
             <a:endParaRPr lang="en-US"/>
           </a:p>
@@ -5455,7 +5455,7 @@
           <a:p>
             <a:fld id="{5958763E-B898-436D-883D-03711491D54A}" type="datetimeFigureOut">
               <a:rPr lang="en-US" smtClean="0"/>
-              <a:t>8/6/2025</a:t>
+              <a:t>6/8/2026</a:t>
             </a:fld>
             <a:endParaRPr lang="en-US"/>
           </a:p>
@@ -5705,7 +5705,7 @@
           <a:p>
             <a:fld id="{5958763E-B898-436D-883D-03711491D54A}" type="datetimeFigureOut">
               <a:rPr lang="en-US" smtClean="0"/>
-              <a:t>8/6/2025</a:t>
+              <a:t>6/8/2026</a:t>
             </a:fld>
             <a:endParaRPr lang="en-US"/>
           </a:p>
@@ -6053,7 +6053,7 @@
           <a:p>
             <a:fld id="{5958763E-B898-436D-883D-03711491D54A}" type="datetimeFigureOut">
               <a:rPr lang="en-US" smtClean="0"/>
-              <a:t>8/6/2025</a:t>
+              <a:t>6/8/2026</a:t>
             </a:fld>
             <a:endParaRPr lang="en-US"/>
           </a:p>
@@ -6469,7 +6469,7 @@
           <a:p>
             <a:fld id="{5958763E-B898-436D-883D-03711491D54A}" type="datetimeFigureOut">
               <a:rPr lang="en-US" smtClean="0"/>
-              <a:t>8/6/2025</a:t>
+              <a:t>6/8/2026</a:t>
             </a:fld>
             <a:endParaRPr lang="en-US"/>
           </a:p>
@@ -6970,7 +6970,7 @@
           <a:p>
             <a:fld id="{5958763E-B898-436D-883D-03711491D54A}" type="datetimeFigureOut">
               <a:rPr lang="en-US" smtClean="0"/>
-              <a:t>8/6/2025</a:t>
+              <a:t>6/8/2026</a:t>
             </a:fld>
             <a:endParaRPr lang="en-US"/>
           </a:p>
@@ -7421,7 +7421,7 @@
           <a:p>
             <a:fld id="{5958763E-B898-436D-883D-03711491D54A}" type="datetimeFigureOut">
               <a:rPr lang="en-US" smtClean="0"/>
-              <a:t>8/6/2025</a:t>
+              <a:t>6/8/2026</a:t>
             </a:fld>
             <a:endParaRPr lang="en-US"/>
           </a:p>
@@ -8032,7 +8032,7 @@
           <a:p>
             <a:fld id="{5958763E-B898-436D-883D-03711491D54A}" type="datetimeFigureOut">
               <a:rPr lang="en-US" smtClean="0"/>
-              <a:t>8/6/2025</a:t>
+              <a:t>6/8/2026</a:t>
             </a:fld>
             <a:endParaRPr lang="en-US"/>
           </a:p>
@@ -8803,7 +8803,7 @@
           <a:p>
             <a:fld id="{5958763E-B898-436D-883D-03711491D54A}" type="datetimeFigureOut">
               <a:rPr lang="en-US" smtClean="0"/>
-              <a:t>8/6/2025</a:t>
+              <a:t>6/8/2026</a:t>
             </a:fld>
             <a:endParaRPr lang="en-US"/>
           </a:p>
@@ -8907,7 +8907,7 @@
           <a:p>
             <a:fld id="{5958763E-B898-436D-883D-03711491D54A}" type="datetimeFigureOut">
               <a:rPr lang="en-US" smtClean="0"/>
-              <a:t>8/6/2025</a:t>
+              <a:t>6/8/2026</a:t>
             </a:fld>
             <a:endParaRPr lang="en-US"/>
           </a:p>
@@ -9234,7 +9234,7 @@
             <a:fld id="{1C2D31DE-C454-491C-B5C3-F097855E3DF7}" type="datetime4">
               <a:rPr lang="en-US" smtClean="0"/>
               <a:pPr/>
-              <a:t>August 6, 2025</a:t>
+              <a:t>June 8, 2026</a:t>
             </a:fld>
             <a:endParaRPr lang="en-US" dirty="0"/>
           </a:p>
@@ -12386,7 +12386,7 @@
           <a:p>
             <a:fld id="{5958763E-B898-436D-883D-03711491D54A}" type="datetimeFigureOut">
               <a:rPr lang="en-US" smtClean="0"/>
-              <a:t>8/6/2025</a:t>
+              <a:t>6/8/2026</a:t>
             </a:fld>
             <a:endParaRPr lang="en-US"/>
           </a:p>
@@ -12510,7 +12510,7 @@
           <a:p>
             <a:fld id="{5958763E-B898-436D-883D-03711491D54A}" type="datetimeFigureOut">
               <a:rPr lang="en-US" smtClean="0"/>
-              <a:t>8/6/2025</a:t>
+              <a:t>6/8/2026</a:t>
             </a:fld>
             <a:endParaRPr lang="en-US"/>
           </a:p>
@@ -12634,7 +12634,7 @@
           <a:p>
             <a:fld id="{5958763E-B898-436D-883D-03711491D54A}" type="datetimeFigureOut">
               <a:rPr lang="en-US" smtClean="0"/>
-              <a:t>8/6/2025</a:t>
+              <a:t>6/8/2026</a:t>
             </a:fld>
             <a:endParaRPr lang="en-US"/>
           </a:p>
@@ -12758,7 +12758,7 @@
           <a:p>
             <a:fld id="{5958763E-B898-436D-883D-03711491D54A}" type="datetimeFigureOut">
               <a:rPr lang="en-US" smtClean="0"/>
-              <a:t>8/6/2025</a:t>
+              <a:t>6/8/2026</a:t>
             </a:fld>
             <a:endParaRPr lang="en-US"/>
           </a:p>
@@ -12882,7 +12882,7 @@
           <a:p>
             <a:fld id="{5958763E-B898-436D-883D-03711491D54A}" type="datetimeFigureOut">
               <a:rPr lang="en-US" smtClean="0"/>
-              <a:t>8/6/2025</a:t>
+              <a:t>6/8/2026</a:t>
             </a:fld>
             <a:endParaRPr lang="en-US"/>
           </a:p>
@@ -13006,7 +13006,7 @@
           <a:p>
             <a:fld id="{5958763E-B898-436D-883D-03711491D54A}" type="datetimeFigureOut">
               <a:rPr lang="en-US" smtClean="0"/>
-              <a:t>8/6/2025</a:t>
+              <a:t>6/8/2026</a:t>
             </a:fld>
             <a:endParaRPr lang="en-US"/>
           </a:p>
@@ -13130,7 +13130,7 @@
           <a:p>
             <a:fld id="{5958763E-B898-436D-883D-03711491D54A}" type="datetimeFigureOut">
               <a:rPr lang="en-US" smtClean="0"/>
-              <a:t>8/6/2025</a:t>
+              <a:t>6/8/2026</a:t>
             </a:fld>
             <a:endParaRPr lang="en-US"/>
           </a:p>
@@ -13254,7 +13254,7 @@
           <a:p>
             <a:fld id="{5958763E-B898-436D-883D-03711491D54A}" type="datetimeFigureOut">
               <a:rPr lang="en-US" smtClean="0"/>
-              <a:t>8/6/2025</a:t>
+              <a:t>6/8/2026</a:t>
             </a:fld>
             <a:endParaRPr lang="en-US"/>
           </a:p>
@@ -13387,7 +13387,7 @@
           <a:p>
             <a:fld id="{5958763E-B898-436D-883D-03711491D54A}" type="datetimeFigureOut">
               <a:rPr lang="en-US" smtClean="0"/>
-              <a:t>8/6/2025</a:t>
+              <a:t>6/8/2026</a:t>
             </a:fld>
             <a:endParaRPr lang="en-US"/>
           </a:p>
@@ -16726,7 +16726,7 @@
             <a:fld id="{1C2D31DE-C454-491C-B5C3-F097855E3DF7}" type="datetime4">
               <a:rPr lang="en-US" smtClean="0"/>
               <a:pPr/>
-              <a:t>August 6, 2025</a:t>
+              <a:t>June 8, 2026</a:t>
             </a:fld>
             <a:endParaRPr lang="en-US" dirty="0"/>
           </a:p>
@@ -28962,7 +28962,7 @@
           <a:p>
             <a:fld id="{5958763E-B898-436D-883D-03711491D54A}" type="datetimeFigureOut">
               <a:rPr lang="en-US" smtClean="0"/>
-              <a:t>8/6/2025</a:t>
+              <a:t>6/8/2026</a:t>
             </a:fld>
             <a:endParaRPr lang="en-US"/>
           </a:p>
@@ -29364,7 +29364,7 @@
           <a:p>
             <a:fld id="{5958763E-B898-436D-883D-03711491D54A}" type="datetimeFigureOut">
               <a:rPr lang="en-US" smtClean="0"/>
-              <a:t>8/6/2025</a:t>
+              <a:t>6/8/2026</a:t>
             </a:fld>
             <a:endParaRPr lang="en-US"/>
           </a:p>
@@ -29658,7 +29658,7 @@
           <a:p>
             <a:fld id="{5958763E-B898-436D-883D-03711491D54A}" type="datetimeFigureOut">
               <a:rPr lang="en-US" smtClean="0"/>
-              <a:t>8/6/2025</a:t>
+              <a:t>6/8/2026</a:t>
             </a:fld>
             <a:endParaRPr lang="en-US"/>
           </a:p>
@@ -29859,7 +29859,7 @@
           <a:p>
             <a:fld id="{5958763E-B898-436D-883D-03711491D54A}" type="datetimeFigureOut">
               <a:rPr lang="en-US" smtClean="0"/>
-              <a:t>8/6/2025</a:t>
+              <a:t>6/8/2026</a:t>
             </a:fld>
             <a:endParaRPr lang="en-US"/>
           </a:p>
@@ -30120,7 +30120,7 @@
           <a:p>
             <a:fld id="{5958763E-B898-436D-883D-03711491D54A}" type="datetimeFigureOut">
               <a:rPr lang="en-US" smtClean="0"/>
-              <a:t>8/6/2025</a:t>
+              <a:t>6/8/2026</a:t>
             </a:fld>
             <a:endParaRPr lang="en-US"/>
           </a:p>
@@ -30628,7 +30628,7 @@
           <a:p>
             <a:fld id="{5958763E-B898-436D-883D-03711491D54A}" type="datetimeFigureOut">
               <a:rPr lang="en-US" smtClean="0"/>
-              <a:t>8/6/2025</a:t>
+              <a:t>6/8/2026</a:t>
             </a:fld>
             <a:endParaRPr lang="en-US"/>
           </a:p>
@@ -31107,7 +31107,7 @@
           <a:p>
             <a:fld id="{5958763E-B898-436D-883D-03711491D54A}" type="datetimeFigureOut">
               <a:rPr lang="en-US" smtClean="0"/>
-              <a:t>8/6/2025</a:t>
+              <a:t>6/8/2026</a:t>
             </a:fld>
             <a:endParaRPr lang="en-US"/>
           </a:p>
@@ -31926,7 +31926,7 @@
           <a:p>
             <a:fld id="{5958763E-B898-436D-883D-03711491D54A}" type="datetimeFigureOut">
               <a:rPr lang="en-US" smtClean="0"/>
-              <a:t>8/6/2025</a:t>
+              <a:t>6/8/2026</a:t>
             </a:fld>
             <a:endParaRPr lang="en-US"/>
           </a:p>
@@ -32127,7 +32127,7 @@
           <a:p>
             <a:fld id="{5958763E-B898-436D-883D-03711491D54A}" type="datetimeFigureOut">
               <a:rPr lang="en-US" smtClean="0"/>
-              <a:t>8/6/2025</a:t>
+              <a:t>6/8/2026</a:t>
             </a:fld>
             <a:endParaRPr lang="en-US"/>
           </a:p>
@@ -32462,7 +32462,7 @@
           <a:p>
             <a:fld id="{5958763E-B898-436D-883D-03711491D54A}" type="datetimeFigureOut">
               <a:rPr lang="en-US" smtClean="0"/>
-              <a:t>8/6/2025</a:t>
+              <a:t>6/8/2026</a:t>
             </a:fld>
             <a:endParaRPr lang="en-US"/>
           </a:p>
@@ -32692,7 +32692,7 @@
           <a:p>
             <a:fld id="{5958763E-B898-436D-883D-03711491D54A}" type="datetimeFigureOut">
               <a:rPr lang="en-US" smtClean="0"/>
-              <a:t>8/6/2025</a:t>
+              <a:t>6/8/2026</a:t>
             </a:fld>
             <a:endParaRPr lang="en-US"/>
           </a:p>
@@ -32936,7 +32936,7 @@
           <a:p>
             <a:fld id="{5958763E-B898-436D-883D-03711491D54A}" type="datetimeFigureOut">
               <a:rPr lang="en-US" smtClean="0"/>
-              <a:t>8/6/2025</a:t>
+              <a:t>6/8/2026</a:t>
             </a:fld>
             <a:endParaRPr lang="en-US"/>
           </a:p>
@@ -33484,7 +33484,7 @@
         <p:spPr>
           <a:xfrm>
             <a:off x="381000" y="3429000"/>
-            <a:ext cx="4883068" cy="553998"/>
+            <a:ext cx="5859489" cy="553998"/>
           </a:xfrm>
         </p:spPr>
         <p:txBody>
@@ -33492,12 +33492,8 @@
           <a:lstStyle/>
           <a:p>
             <a:r>
-              <a:rPr lang="en-US" dirty="0"/>
-              <a:t>Hy-Tech Club: </a:t>
-            </a:r>
-            <a:r>
               <a:rPr lang="en-US"/>
-              <a:t>Web 102</a:t>
+              <a:t>HTO: Website Development</a:t>
             </a:r>
             <a:endParaRPr lang="en-US" dirty="0"/>
           </a:p>
